--- a/2.Texto/Imag/fig_secuencia_start.pptx
+++ b/2.Texto/Imag/fig_secuencia_start.pptx
@@ -104,6 +104,11 @@
       </a:defRPr>
     </a:lvl9pPr>
   </p:defaultTextStyle>
+  <p:extLst>
+    <p:ext uri="{EFAFB233-063F-42B5-8137-9DF3F51BA10A}">
+      <p15:sldGuideLst xmlns:p15="http://schemas.microsoft.com/office/powerpoint/2012/main"/>
+    </p:ext>
+  </p:extLst>
 </p:presentation>
 </file>
 
@@ -238,7 +243,7 @@
           <a:p>
             <a:fld id="{5E5B7565-14FC-45B7-A0FD-BE613CE26E5D}" type="datetimeFigureOut">
               <a:rPr lang="en-US" smtClean="0"/>
-              <a:t>3/25/2026</a:t>
+              <a:t>5/21/2026</a:t>
             </a:fld>
             <a:endParaRPr lang="en-US"/>
           </a:p>
@@ -408,7 +413,7 @@
           <a:p>
             <a:fld id="{5E5B7565-14FC-45B7-A0FD-BE613CE26E5D}" type="datetimeFigureOut">
               <a:rPr lang="en-US" smtClean="0"/>
-              <a:t>3/25/2026</a:t>
+              <a:t>5/21/2026</a:t>
             </a:fld>
             <a:endParaRPr lang="en-US"/>
           </a:p>
@@ -588,7 +593,7 @@
           <a:p>
             <a:fld id="{5E5B7565-14FC-45B7-A0FD-BE613CE26E5D}" type="datetimeFigureOut">
               <a:rPr lang="en-US" smtClean="0"/>
-              <a:t>3/25/2026</a:t>
+              <a:t>5/21/2026</a:t>
             </a:fld>
             <a:endParaRPr lang="en-US"/>
           </a:p>
@@ -758,7 +763,7 @@
           <a:p>
             <a:fld id="{5E5B7565-14FC-45B7-A0FD-BE613CE26E5D}" type="datetimeFigureOut">
               <a:rPr lang="en-US" smtClean="0"/>
-              <a:t>3/25/2026</a:t>
+              <a:t>5/21/2026</a:t>
             </a:fld>
             <a:endParaRPr lang="en-US"/>
           </a:p>
@@ -1004,7 +1009,7 @@
           <a:p>
             <a:fld id="{5E5B7565-14FC-45B7-A0FD-BE613CE26E5D}" type="datetimeFigureOut">
               <a:rPr lang="en-US" smtClean="0"/>
-              <a:t>3/25/2026</a:t>
+              <a:t>5/21/2026</a:t>
             </a:fld>
             <a:endParaRPr lang="en-US"/>
           </a:p>
@@ -1236,7 +1241,7 @@
           <a:p>
             <a:fld id="{5E5B7565-14FC-45B7-A0FD-BE613CE26E5D}" type="datetimeFigureOut">
               <a:rPr lang="en-US" smtClean="0"/>
-              <a:t>3/25/2026</a:t>
+              <a:t>5/21/2026</a:t>
             </a:fld>
             <a:endParaRPr lang="en-US"/>
           </a:p>
@@ -1603,7 +1608,7 @@
           <a:p>
             <a:fld id="{5E5B7565-14FC-45B7-A0FD-BE613CE26E5D}" type="datetimeFigureOut">
               <a:rPr lang="en-US" smtClean="0"/>
-              <a:t>3/25/2026</a:t>
+              <a:t>5/21/2026</a:t>
             </a:fld>
             <a:endParaRPr lang="en-US"/>
           </a:p>
@@ -1721,7 +1726,7 @@
           <a:p>
             <a:fld id="{5E5B7565-14FC-45B7-A0FD-BE613CE26E5D}" type="datetimeFigureOut">
               <a:rPr lang="en-US" smtClean="0"/>
-              <a:t>3/25/2026</a:t>
+              <a:t>5/21/2026</a:t>
             </a:fld>
             <a:endParaRPr lang="en-US"/>
           </a:p>
@@ -1816,7 +1821,7 @@
           <a:p>
             <a:fld id="{5E5B7565-14FC-45B7-A0FD-BE613CE26E5D}" type="datetimeFigureOut">
               <a:rPr lang="en-US" smtClean="0"/>
-              <a:t>3/25/2026</a:t>
+              <a:t>5/21/2026</a:t>
             </a:fld>
             <a:endParaRPr lang="en-US"/>
           </a:p>
@@ -2093,7 +2098,7 @@
           <a:p>
             <a:fld id="{5E5B7565-14FC-45B7-A0FD-BE613CE26E5D}" type="datetimeFigureOut">
               <a:rPr lang="en-US" smtClean="0"/>
-              <a:t>3/25/2026</a:t>
+              <a:t>5/21/2026</a:t>
             </a:fld>
             <a:endParaRPr lang="en-US"/>
           </a:p>
@@ -2350,7 +2355,7 @@
           <a:p>
             <a:fld id="{5E5B7565-14FC-45B7-A0FD-BE613CE26E5D}" type="datetimeFigureOut">
               <a:rPr lang="en-US" smtClean="0"/>
-              <a:t>3/25/2026</a:t>
+              <a:t>5/21/2026</a:t>
             </a:fld>
             <a:endParaRPr lang="en-US"/>
           </a:p>
@@ -2563,7 +2568,7 @@
           <a:p>
             <a:fld id="{5E5B7565-14FC-45B7-A0FD-BE613CE26E5D}" type="datetimeFigureOut">
               <a:rPr lang="en-US" smtClean="0"/>
-              <a:t>3/25/2026</a:t>
+              <a:t>5/21/2026</a:t>
             </a:fld>
             <a:endParaRPr lang="en-US"/>
           </a:p>
@@ -3457,8 +3462,8 @@
         </p:nvSpPr>
         <p:spPr>
           <a:xfrm>
-            <a:off x="12321071" y="2097521"/>
-            <a:ext cx="494986" cy="3082139"/>
+            <a:off x="12321071" y="2115934"/>
+            <a:ext cx="494986" cy="3063726"/>
           </a:xfrm>
           <a:prstGeom prst="roundRect">
             <a:avLst>
@@ -4788,8 +4793,8 @@
         </p:nvSpPr>
         <p:spPr>
           <a:xfrm>
-            <a:off x="895448" y="5604079"/>
-            <a:ext cx="1860702" cy="657103"/>
+            <a:off x="895447" y="5604079"/>
+            <a:ext cx="3882613" cy="657103"/>
           </a:xfrm>
           <a:prstGeom prst="rect">
             <a:avLst/>
@@ -5245,7 +5250,7 @@
         <p:spPr>
           <a:xfrm>
             <a:off x="12842694" y="4304364"/>
-            <a:ext cx="1995621" cy="1299715"/>
+            <a:ext cx="1995621" cy="954749"/>
           </a:xfrm>
           <a:prstGeom prst="rect">
             <a:avLst/>
@@ -5303,36 +5308,12 @@
           </a:p>
           <a:p>
             <a:r>
-              <a:rPr lang="en-US" sz="1121" dirty="0" err="1">
-                <a:solidFill>
-                  <a:srgbClr val="FF0000"/>
-                </a:solidFill>
-              </a:rPr>
-              <a:t>Kp</a:t>
-            </a:r>
-            <a:r>
               <a:rPr lang="en-US" sz="1121" dirty="0">
                 <a:solidFill>
                   <a:srgbClr val="FF0000"/>
                 </a:solidFill>
               </a:rPr>
-              <a:t>=16.0 </a:t>
-            </a:r>
-            <a:r>
-              <a:rPr lang="en-US" sz="1121" dirty="0" err="1">
-                <a:solidFill>
-                  <a:srgbClr val="FF0000"/>
-                </a:solidFill>
-              </a:rPr>
-              <a:t>Kd</a:t>
-            </a:r>
-            <a:r>
-              <a:rPr lang="en-US" sz="1121" dirty="0">
-                <a:solidFill>
-                  <a:srgbClr val="FF0000"/>
-                </a:solidFill>
-              </a:rPr>
-              <a:t>=20.0 Ki=0.001 Ko=50 </a:t>
+              <a:t>Kp1, Kd1, Ki1, Ko=50 </a:t>
             </a:r>
           </a:p>
           <a:p>
@@ -5347,36 +5328,12 @@
           </a:p>
           <a:p>
             <a:r>
-              <a:rPr lang="en-US" sz="1121" dirty="0" err="1">
-                <a:solidFill>
-                  <a:srgbClr val="FF0000"/>
-                </a:solidFill>
-              </a:rPr>
-              <a:t>Kp</a:t>
-            </a:r>
-            <a:r>
               <a:rPr lang="en-US" sz="1121" dirty="0">
                 <a:solidFill>
                   <a:srgbClr val="FF0000"/>
                 </a:solidFill>
               </a:rPr>
-              <a:t>=16.42 </a:t>
-            </a:r>
-            <a:r>
-              <a:rPr lang="en-US" sz="1121" dirty="0" err="1">
-                <a:solidFill>
-                  <a:srgbClr val="FF0000"/>
-                </a:solidFill>
-              </a:rPr>
-              <a:t>Kd</a:t>
-            </a:r>
-            <a:r>
-              <a:rPr lang="en-US" sz="1121" dirty="0">
-                <a:solidFill>
-                  <a:srgbClr val="FF0000"/>
-                </a:solidFill>
-              </a:rPr>
-              <a:t>=20.05 Ki=0.001 Ko=50</a:t>
+              <a:t>Kp2, Kd2, Ki2, Ko=50</a:t>
             </a:r>
           </a:p>
         </p:txBody>
@@ -5842,6 +5799,67 @@
           <a:p>
             <a:pPr algn="ctr"/>
             <a:endParaRPr lang="en-US" sz="1835">
+              <a:solidFill>
+                <a:srgbClr val="002060"/>
+              </a:solidFill>
+            </a:endParaRPr>
+          </a:p>
+        </p:txBody>
+      </p:sp>
+      <p:sp>
+        <p:nvSpPr>
+          <p:cNvPr id="2" name="TextBox 1">
+            <a:extLst>
+              <a:ext uri="{FF2B5EF4-FFF2-40B4-BE49-F238E27FC236}">
+                <a16:creationId xmlns:a16="http://schemas.microsoft.com/office/drawing/2014/main" id="{088739C1-1207-90A0-4AEC-7C0AC695AE14}"/>
+              </a:ext>
+            </a:extLst>
+          </p:cNvPr>
+          <p:cNvSpPr txBox="1"/>
+          <p:nvPr/>
+        </p:nvSpPr>
+        <p:spPr>
+          <a:xfrm>
+            <a:off x="6279681" y="5807199"/>
+            <a:ext cx="3017606" cy="437299"/>
+          </a:xfrm>
+          <a:prstGeom prst="rect">
+            <a:avLst/>
+          </a:prstGeom>
+          <a:noFill/>
+        </p:spPr>
+        <p:txBody>
+          <a:bodyPr wrap="square">
+            <a:spAutoFit/>
+          </a:bodyPr>
+          <a:lstStyle/>
+          <a:p>
+            <a:pPr algn="ctr"/>
+            <a:r>
+              <a:rPr lang="es-ES" sz="1121" dirty="0">
+                <a:solidFill>
+                  <a:srgbClr val="002060"/>
+                </a:solidFill>
+              </a:rPr>
+              <a:t>configure(): apertura del puerto + espera 3 s para </a:t>
+            </a:r>
+            <a:r>
+              <a:rPr lang="es-ES" sz="1121" dirty="0" err="1">
+                <a:solidFill>
+                  <a:srgbClr val="002060"/>
+                </a:solidFill>
+              </a:rPr>
+              <a:t>reset</a:t>
+            </a:r>
+            <a:r>
+              <a:rPr lang="es-ES" sz="1121" dirty="0">
+                <a:solidFill>
+                  <a:srgbClr val="002060"/>
+                </a:solidFill>
+              </a:rPr>
+              <a:t> del CH340</a:t>
+            </a:r>
+            <a:endParaRPr lang="en-US" sz="1121" dirty="0">
               <a:solidFill>
                 <a:srgbClr val="002060"/>
               </a:solidFill>
